--- a/classes/parte-6-sistemas-de-recomendacion/218-content-based-filtering/clase-218-content-based-filtering-presentacion.pptx
+++ b/classes/parte-6-sistemas-de-recomendacion/218-content-based-filtering/clase-218-content-based-filtering-presentacion.pptx
@@ -3272,7 +3272,7 @@
                 </a:solidFill>
                 <a:latin typeface="Segoe UI"/>
               </a:rPr>
-              <a:t>Parte: 6 — Sistemas de Recomendación · Fuente: Aggarwal Recommender Systems: The Textbook cap. 4 + docs scikit-learn TfidfVectorizer.  Duración estimada: 70 min.</a:t>
+              <a:t>Parte: 6 — Sistemas de Recomendación · Fuente: Aggarwal Recommender Systems: The Textbook cap. 4 + docs scikit-learn TfidfVectorizer.  Duración estimada: 70 min. · Nivel: Intermedio-Avanzado</a:t>
             </a:r>
           </a:p>
         </p:txBody>
@@ -3581,7 +3581,7 @@
                 </a:solidFill>
                 <a:latin typeface="Segoe UI"/>
               </a:rPr>
-              <a:t>Parte: 6 — Sistemas de Recomendación · Fuente: Aggarwal Recommender Systems: The Textbook cap. 4 + docs scikit-learn TfidfVectorizer.  Duración estimada: 70 min.</a:t>
+              <a:t>Parte: 6 — Sistemas de Recomendación · Fuente: Aggarwal Recommender Systems: The Textbook cap. 4 + docs scikit-learn TfidfVectorizer.  Duración estimada: 70 min. · Nivel: Intermedio-Avanzado</a:t>
             </a:r>
           </a:p>
         </p:txBody>
